--- a/presentation/Badeel-Presentation.pptx
+++ b/presentation/Badeel-Presentation.pptx
@@ -510,7 +510,7 @@
           <a:p>
             <a:r>
               <a:rPr lang="en-US" dirty="0"/>
-              <a:t>Open calm. Name the project, then go straight to the problem — don't list technologies yet.</a:t>
+              <a:t/>
             </a:r>
             <a:endParaRPr lang="en-US" dirty="0"/>
           </a:p>
@@ -598,7 +598,7 @@
           <a:p>
             <a:r>
               <a:rPr lang="en-US" dirty="0"/>
-              <a:t>Set the scene in three beats. End on: this is a clinical decision made under pressure.</a:t>
+              <a:t/>
             </a:r>
             <a:endParaRPr lang="en-US" dirty="0"/>
           </a:p>
@@ -686,7 +686,7 @@
           <a:p>
             <a:r>
               <a:rPr lang="en-US" dirty="0"/>
-              <a:t>This is the slide that frames everything. Land the contrast, then move on quickly.</a:t>
+              <a:t/>
             </a:r>
             <a:endParaRPr lang="en-US" dirty="0"/>
           </a:p>
@@ -774,7 +774,7 @@
           <a:p>
             <a:r>
               <a:rPr lang="en-US" dirty="0"/>
-              <a:t>Three roles, strictly separated. Say it plainly: the model finds facts, Python makes decisions.</a:t>
+              <a:t/>
             </a:r>
             <a:endParaRPr lang="en-US" dirty="0"/>
           </a:p>
@@ -862,7 +862,7 @@
           <a:p>
             <a:r>
               <a:rPr lang="en-US" dirty="0"/>
-              <a:t>Don't read all six. Say: it never suggests before it screens, and point at the last line.</a:t>
+              <a:t/>
             </a:r>
             <a:endParaRPr lang="en-US" dirty="0"/>
           </a:p>
@@ -950,7 +950,7 @@
           <a:p>
             <a:r>
               <a:rPr lang="en-US" dirty="0"/>
-              <a:t>This is the 'new idea' the brief asks for. Use the doorman line — it lands with everyone.</a:t>
+              <a:t/>
             </a:r>
             <a:endParaRPr lang="en-US" dirty="0"/>
           </a:p>
@@ -1038,7 +1038,7 @@
           <a:p>
             <a:r>
               <a:rPr lang="en-US" dirty="0"/>
-              <a:t>Switch to the browser here. Do NOT read this list aloud — it is a map for you.</a:t>
+              <a:t/>
             </a:r>
             <a:endParaRPr lang="en-US" dirty="0"/>
           </a:p>
@@ -1126,7 +1126,7 @@
           <a:p>
             <a:r>
               <a:rPr lang="en-US" dirty="0"/>
-              <a:t>Lead with the two 100% rows side by side. The 7% -&gt; 57% line is the punchline.</a:t>
+              <a:t/>
             </a:r>
             <a:endParaRPr lang="en-US" dirty="0"/>
           </a:p>
@@ -1214,7 +1214,7 @@
           <a:p>
             <a:r>
               <a:rPr lang="en-US" dirty="0"/>
-              <a:t>Say the two lines slowly. Then stop talking and take questions.</a:t>
+              <a:t/>
             </a:r>
             <a:endParaRPr lang="en-US" dirty="0"/>
           </a:p>
